--- a/decks/geog-local-place/geog-local-place_ch3_hayes.pptx
+++ b/decks/geog-local-place/geog-local-place_ch3_hayes.pptx
@@ -126,30 +126,30 @@
   <p:extLst>
     <p:ext uri="{521415D9-36F7-43E2-AB2F-B90AF26B5E84}">
       <p14:sectionLst xmlns:p14="http://schemas.microsoft.com/office/powerpoint/2010/main">
-        <p14:section name="Opening" id="{43002dc2-979e-47eb-aa5d-c12b15c743ce}">
+        <p14:section name="Opening" id="{3826b367-98ec-aaa0-70ab-bb6c24021663}">
           <p14:sldIdLst>
             <p14:sldId id="256"/>
           </p14:sldIdLst>
         </p14:section>
-        <p14:section name="Gate" id="{ce2ba244-d3f3-b184-e916-7fd9b10148ac}">
+        <p14:section name="Gate" id="{846004d5-6a37-cc46-4cae-ffa8e9a6bf97}">
           <p14:sldIdLst>
             <p14:sldId id="257"/>
             <p14:sldId id="258"/>
           </p14:sldIdLst>
         </p14:section>
-        <p14:section name="Pre-teach" id="{e459c0d1-6d85-32f5-be71-9f6e368bf58b}">
+        <p14:section name="Pre-teach" id="{7d87a236-037d-fa6d-9c7e-4bac5bfa4210}">
           <p14:sldIdLst>
             <p14:sldId id="259"/>
             <p14:sldId id="260"/>
           </p14:sldIdLst>
         </p14:section>
-        <p14:section name="Read-along" id="{f21f5de8-79c1-a988-ac96-cdf74a24f4aa}">
+        <p14:section name="Read-along" id="{20d75c4b-4702-05a1-8a17-6e4ce833edbe}">
           <p14:sldIdLst>
             <p14:sldId id="261"/>
             <p14:sldId id="262"/>
           </p14:sldIdLst>
         </p14:section>
-        <p14:section name="Teach" id="{369e5f0b-5da9-b0fc-2349-f159746169a6}">
+        <p14:section name="Teach" id="{5fa5a89e-1844-ef6d-c466-ad69c70e46b4}">
           <p14:sldIdLst>
             <p14:sldId id="263"/>
             <p14:sldId id="264"/>
@@ -158,7 +158,7 @@
             <p14:sldId id="267"/>
           </p14:sldIdLst>
         </p14:section>
-        <p14:section name="Routes" id="{7ba9c652-2e03-3d36-9e7c-96a335c68538}">
+        <p14:section name="Routes" id="{31664a67-04dc-0473-e550-d2ce951f2ff6}">
           <p14:sldIdLst>
             <p14:sldId id="268"/>
             <p14:sldId id="269"/>
@@ -166,12 +166,12 @@
             <p14:sldId id="271"/>
           </p14:sldIdLst>
         </p14:section>
-        <p14:section name="Close" id="{f8d62488-16ec-bb0f-eae3-92f14b8a2d0d}">
+        <p14:section name="Close" id="{c33a90f9-42e1-6181-51e4-3402489396db}">
           <p14:sldIdLst>
             <p14:sldId id="272"/>
           </p14:sldIdLst>
         </p14:section>
-        <p14:section name="Answers" id="{77920a8b-ed5e-1826-2603-8ca5acd27829}">
+        <p14:section name="Answers" id="{58c45f46-14ed-82eb-c19a-364eac80dc1d}">
           <p14:sldIdLst>
             <p14:sldId id="273"/>
             <p14:sldId id="274"/>
@@ -674,8 +674,8 @@
             <a:r>
               <a:rPr lang="en-US" dirty="0"/>
               <a:t>Teach — Counting people: the census. Say it in your own words, then check understanding with a quick question: ask a pupil from the pre-teach group first, since they met these words and ideas before the lesson. Pupils try to recall before you re-explain.
-The census is a fantastic source of information. The first census was carried out in 1801 and one has been taken every 10 years since then, apart from 1941, because of the Second World War. A census return gives information about the population, including the names, ages and occupations of the people living in each household. Historians and geographers use census returns to see who lived in a place and what work they did.
-The deck gives population figures for Hayes from the census: 233 610 in 1981, 236 047 in 1990, 245 911 in 2000, 269 465 in 2010 and 298 370 in 2015. Reading down the table, the population rose every time, and the rises got bigger: about 2 400 between 1981 and 1990, about 9 900 between 1990 and 2000, about 23 600 between 2000 and 2010 and about 28 900 between 2010 and 2015. Altogether the population increased by about 65 000 from 1981 to 2015.
+The census is a rich source for anyone studying a place. The first census was carried out in 1801 and one has been taken every 10 years since then, apart from 1941, because of the Second World War. A census return lists who was in each household on one night: their names, their ages and the work they did. Historians and geographers use census returns to see who lived in a place and what work they did.
+The deck's own table gives population figures for Hayes in five years: 233 610 in 1981, 236 047 in 1990, 245 911 in 2000, 269 465 in 2010 and 298 370 in 2015. Reading down the table, the population rose every time, and the rises got bigger: about 2 400 between 1981 and 1990, about 9 900 between 1990 and 2000, about 23 600 between 2000 and 2010 and about 28 900 between 2010 and 2015. Altogether the population increased by about 65 000 from 1981 to 2015.
 To compare growth fairly we use percentage increase. The rule is: new number minus original number, divided by the original number, times 100. For Hayes that is 298 370 − 233 610 = 64 760, then 64 760 ÷ 233 610 × 100, which is about 27.7 %. Be careful: if you divide by the new number instead of the original, you get about 21.7 %, which is wrong. Always divide by the number you started with. Why are more people living in Hayes? Jobs at Heathrow, good transport into London and new housing all draw people in, many of them moving from other parts of London and from abroad.
 Worked example — model it step by step, thinking aloud: The population of Hayes was 233 610 in 1981 and 298 370 in 2015. Work out the percentage increase. (1) Find the increase: 298 370 − 233 610 = 64 760. (2) Divide by the original number: 64 760 ÷ 233 610 = 0.277 (to three decimal places). (3) Multiply by 100: about 27.7 %. (4) Check the sense: 64 760 is a bit more than a quarter of 233 610, and a quarter is 25 %, so 27.7 % is reasonable. Answer: About 27.7 %.
 Tip: Percentage increase: (new − original) ÷ original × 100. The word original appears twice for a reason.</a:t>
@@ -768,7 +768,7 @@
               <a:rPr lang="en-US" dirty="0"/>
               <a:t>Teach — Famous for an airport and a railway. Say it in your own words, then check understanding with a quick question: ask a pupil from the pre-teach group first, since they met these words and ideas before the lesson. Pupils try to recall before you re-explain.
 Look at a map of Hayes and two symbols stand out: an airport and a railway station. Hayes is famous for Heathrow airport, which lies just to the south, and for Hayes railway station. A 1930s map in the deck shows the site of Heathrow as fields; the airport was built in 1946. Heathrow brings jobs, noise and traffic to the whole area, and it is one reason the population has grown.
-Hayes is now even more famous for a new railway: Crossrail, which is called the Elizabeth line. It is a new railway for London and the South East, running from Reading and Heathrow in the west to Shenfield and Abbey Wood in the east, and it runs through Hayes. The deck gives its cost as £15 billion. When you studied it, the line was still being built; it has since opened, so check the latest news for how it is being used.
+Hayes is now even more famous for a new railway: Crossrail, which is called the Elizabeth line. The line was built to carry people across London and the South East. Its western ends are Reading and Heathrow; its eastern ends are Shenfield and Abbey Wood; and the trains run through Hayes. The deck gives its cost as £15 billion. When you studied it, the line was still being built; it has since opened, so check the latest news for how it is being used.
 A new railway has benefits and costs. The benefits the deck lists are faster and easier travel between London and the South East, jobs for people, growth in businesses, and a rise in house prices for owners and developers. The costs are a rise in house prices for tenants and new movers, loss of green spaces, loss of homes, the bill for taxpayers, and more expensive travel on the new line. Notice that rising house prices appear on both sides: good if you own a home, bad if you rent or want to buy.
 Tip: Advantages and disadvantages depend on who you are. Say who gains and who loses, and you have written a geographer's answer.</a:t>
             </a:r>
@@ -859,7 +859,7 @@
             <a:r>
               <a:rPr lang="en-US" dirty="0"/>
               <a:t>Teach — Marking local history: plaques, capsules and old maps. Say it in your own words, then check understanding with a quick question: ask a pupil from the pre-teach group first, since they met these words and ideas before the lesson. Pupils try to recall before you re-explain.
-Places keep their history in several ways. A blue plaque is a sign which shows where famous people lived or where famous events happened. In class you searched a website for blue plaques within 100 miles of the school and marked them on a sketch map, with the person's name and dates in a key. A time capsule is a container in which artefacts are put, to be opened at a date in the future. The deck shows one in New York that will be opened in the year 6939 to tell people of the future what life is like today. You designed your own with five objects that tell the story of your local area now.
+Places keep their history in several ways. A blue plaque is a small sign fixed to a building to record that someone famous once lived there, or that something important happened on that spot. In class you searched a website for blue plaques within 100 miles of the school and marked them on a sketch map, with the person's name and dates in a key. A time capsule is a sealed box of objects, stored away so that it can be opened on a chosen date far ahead. The deck shows one in New York that will be opened in the year 6939 to tell people of the future what life is like today. You designed your own with five objects that tell the story of your local area now.
 Old maps tell local history too. Two maps of Bristol, from 1866 and 1946, show the city growing to the north and west, so the map with less growth is the older one. A 1925 OS map of Catstye Cam and Helvellyn in the Lake District would look almost the same today, because a glaciated landscape with no settlements takes thousands of years to change. The name Liverpool means pool or creek with thick or muddy water, and the pool can be seen on an old map of the city. A 1946 map of the River Severn shows a railway crossing the river, with a station on the northern bank called Severn Bridge station; today two road bridges cross there instead.
 At the end of the unit you designed a mural, a large work of art on a wall, telling the story of the local area, in the spirit of the Bayeux Tapestry: a piece of embroidered cloth about 50 cm high and 70 m long that tells the story of the Norman invasion of England in 1066. A good mural, like a good map, shows what has changed and what has stayed the same.
 Tip: To date an old map, look for what is missing: no airport, no motorway, a railway that has since closed.</a:t>
@@ -2350,8 +2350,8 @@
             <a:r>
               <a:rPr lang="en-US" dirty="0"/>
               <a:t>Teach — Counting people: the census. Say it in your own words, then check understanding with a quick question: ask a pupil from the pre-teach group first, since they met these words and ideas before the lesson. Pupils try to recall before you re-explain.
-The census is a fantastic source of information. The first census was carried out in 1801 and one has been taken every 10 years since then, apart from 1941, because of the Second World War. A census return gives information about the population, including the names, ages and occupations of the people living in each household. Historians and geographers use census returns to see who lived in a place and what work they did.
-The deck gives population figures for Hayes from the census: 233 610 in 1981, 236 047 in 1990, 245 911 in 2000, 269 465 in 2010 and 298 370 in 2015. Reading down the table, the population rose every time, and the rises got bigger: about 2 400 between 1981 and 1990, about 9 900 between 1990 and 2000, about 23 600 between 2000 and 2010 and about 28 900 between 2010 and 2015. Altogether the population increased by about 65 000 from 1981 to 2015.
+The census is a rich source for anyone studying a place. The first census was carried out in 1801 and one has been taken every 10 years since then, apart from 1941, because of the Second World War. A census return lists who was in each household on one night: their names, their ages and the work they did. Historians and geographers use census returns to see who lived in a place and what work they did.
+The deck's own table gives population figures for Hayes in five years: 233 610 in 1981, 236 047 in 1990, 245 911 in 2000, 269 465 in 2010 and 298 370 in 2015. Reading down the table, the population rose every time, and the rises got bigger: about 2 400 between 1981 and 1990, about 9 900 between 1990 and 2000, about 23 600 between 2000 and 2010 and about 28 900 between 2010 and 2015. Altogether the population increased by about 65 000 from 1981 to 2015.
 To compare growth fairly we use percentage increase. The rule is: new number minus original number, divided by the original number, times 100. For Hayes that is 298 370 − 233 610 = 64 760, then 64 760 ÷ 233 610 × 100, which is about 27.7 %. Be careful: if you divide by the new number instead of the original, you get about 21.7 %, which is wrong. Always divide by the number you started with. Why are more people living in Hayes? Jobs at Heathrow, good transport into London and new housing all draw people in, many of them moving from other parts of London and from abroad.
 Worked example — model it step by step, thinking aloud: The population of Hayes was 233 610 in 1981 and 298 370 in 2015. Work out the percentage increase. (1) Find the increase: 298 370 − 233 610 = 64 760. (2) Divide by the original number: 64 760 ÷ 233 610 = 0.277 (to three decimal places). (3) Multiply by 100: about 27.7 %. (4) Check the sense: 64 760 is a bit more than a quarter of 233 610, and a quarter is 25 %, so 27.7 % is reasonable. Answer: About 27.7 %.
 Tip: Percentage increase: (new − original) ÷ original × 100. The word original appears twice for a reason.</a:t>
@@ -5830,11 +5830,11 @@
         <p:spPr>
           <a:xfrm>
             <a:off x="548640" y="1389888"/>
-            <a:ext cx="11094415" cy="903901"/>
+            <a:ext cx="11094415" cy="1234440"/>
           </a:xfrm>
           <a:prstGeom prst="roundRect">
             <a:avLst>
-              <a:gd name="adj" fmla="val 8093"/>
+              <a:gd name="adj" fmla="val 5926"/>
             </a:avLst>
           </a:prstGeom>
           <a:solidFill>
@@ -5851,7 +5851,7 @@
         </p:nvSpPr>
         <p:spPr>
           <a:xfrm>
-            <a:off x="676656" y="1675546"/>
+            <a:off x="676656" y="1840815"/>
             <a:ext cx="384048" cy="332586"/>
           </a:xfrm>
           <a:prstGeom prst="hexagon">
@@ -5872,7 +5872,7 @@
         <p:spPr>
           <a:xfrm>
             <a:off x="1143000" y="1389888"/>
-            <a:ext cx="10408615" cy="903901"/>
+            <a:ext cx="10408615" cy="1234440"/>
           </a:xfrm>
           <a:prstGeom prst="rect">
             <a:avLst/>
@@ -5888,7 +5888,7 @@
               <a:buNone/>
             </a:pPr>
             <a:r>
-              <a:rPr lang="en-US" sz="2200" dirty="0">
+              <a:rPr lang="en-US" sz="2000" dirty="0">
                 <a:solidFill>
                   <a:srgbClr val="1E2229"/>
                 </a:solidFill>
@@ -5896,9 +5896,9 @@
                 <a:ea typeface="Calibri" pitchFamily="34" charset="-122"/>
                 <a:cs typeface="Calibri" pitchFamily="34" charset="-120"/>
               </a:rPr>
-              <a:t>Places keep their history in several ways. A blue plaque is a sign which shows where famous people lived or where famous events happened.</a:t>
-            </a:r>
-            <a:endParaRPr lang="en-US" sz="2200" dirty="0"/>
+              <a:t>Places keep their history in several ways. A blue plaque is a small sign fixed to a building to record that someone famous once lived there, or that something important happened on that spot.</a:t>
+            </a:r>
+            <a:endParaRPr lang="en-US" sz="2000" dirty="0"/>
           </a:p>
         </p:txBody>
       </p:sp>
@@ -5910,12 +5910,12 @@
         </p:nvSpPr>
         <p:spPr>
           <a:xfrm>
-            <a:off x="548640" y="2440093"/>
-            <a:ext cx="11094415" cy="903901"/>
+            <a:off x="548640" y="2770632"/>
+            <a:ext cx="11094415" cy="924560"/>
           </a:xfrm>
           <a:prstGeom prst="roundRect">
             <a:avLst>
-              <a:gd name="adj" fmla="val 8093"/>
+              <a:gd name="adj" fmla="val 7912"/>
             </a:avLst>
           </a:prstGeom>
           <a:solidFill>
@@ -5932,7 +5932,7 @@
         </p:nvSpPr>
         <p:spPr>
           <a:xfrm>
-            <a:off x="676656" y="2725751"/>
+            <a:off x="676656" y="3066619"/>
             <a:ext cx="384048" cy="332586"/>
           </a:xfrm>
           <a:prstGeom prst="hexagon">
@@ -5952,8 +5952,8 @@
         </p:nvSpPr>
         <p:spPr>
           <a:xfrm>
-            <a:off x="1143000" y="2440093"/>
-            <a:ext cx="10408615" cy="903901"/>
+            <a:off x="1143000" y="2770632"/>
+            <a:ext cx="10408615" cy="924560"/>
           </a:xfrm>
           <a:prstGeom prst="rect">
             <a:avLst/>
@@ -5969,7 +5969,7 @@
               <a:buNone/>
             </a:pPr>
             <a:r>
-              <a:rPr lang="en-US" sz="2200" dirty="0">
+              <a:rPr lang="en-US" sz="2000" dirty="0">
                 <a:solidFill>
                   <a:srgbClr val="1E2229"/>
                 </a:solidFill>
@@ -5979,7 +5979,7 @@
               </a:rPr>
               <a:t>Old maps tell local history too. Two maps of Bristol, from 1866 and 1946, show the city growing to the north and west, so the map with less growth is the older one.</a:t>
             </a:r>
-            <a:endParaRPr lang="en-US" sz="2200" dirty="0"/>
+            <a:endParaRPr lang="en-US" sz="2000" dirty="0"/>
           </a:p>
         </p:txBody>
       </p:sp>
@@ -5991,12 +5991,12 @@
         </p:nvSpPr>
         <p:spPr>
           <a:xfrm>
-            <a:off x="548640" y="3490299"/>
-            <a:ext cx="11094415" cy="1585637"/>
+            <a:off x="548640" y="3841496"/>
+            <a:ext cx="11094415" cy="1234440"/>
           </a:xfrm>
           <a:prstGeom prst="roundRect">
             <a:avLst>
-              <a:gd name="adj" fmla="val 4613"/>
+              <a:gd name="adj" fmla="val 5926"/>
             </a:avLst>
           </a:prstGeom>
           <a:solidFill>
@@ -6013,7 +6013,7 @@
         </p:nvSpPr>
         <p:spPr>
           <a:xfrm>
-            <a:off x="676656" y="4116825"/>
+            <a:off x="676656" y="4292423"/>
             <a:ext cx="384048" cy="332586"/>
           </a:xfrm>
           <a:prstGeom prst="hexagon">
@@ -6033,8 +6033,8 @@
         </p:nvSpPr>
         <p:spPr>
           <a:xfrm>
-            <a:off x="1143000" y="3490299"/>
-            <a:ext cx="10408615" cy="1585637"/>
+            <a:off x="1143000" y="3841496"/>
+            <a:ext cx="10408615" cy="1234440"/>
           </a:xfrm>
           <a:prstGeom prst="rect">
             <a:avLst/>
@@ -6050,7 +6050,7 @@
               <a:buNone/>
             </a:pPr>
             <a:r>
-              <a:rPr lang="en-US" sz="2200" dirty="0">
+              <a:rPr lang="en-US" sz="2000" dirty="0">
                 <a:solidFill>
                   <a:srgbClr val="1E2229"/>
                 </a:solidFill>
@@ -6060,7 +6060,7 @@
               </a:rPr>
               <a:t>At the end of the unit you designed a mural, a large work of art on a wall, telling the story of the local area, in the spirit of the Bayeux Tapestry: a piece of embroidered cloth about 50 cm high and 70 m long that tells the story of the Norman invasion of England in 1066.</a:t>
             </a:r>
-            <a:endParaRPr lang="en-US" sz="2200" dirty="0"/>
+            <a:endParaRPr lang="en-US" sz="2000" dirty="0"/>
           </a:p>
         </p:txBody>
       </p:sp>
@@ -16976,7 +16976,7 @@
               <a:buNone/>
             </a:pPr>
             <a:r>
-              <a:rPr lang="en-US" sz="2000" dirty="0">
+              <a:rPr lang="en-US" sz="2200" dirty="0">
                 <a:solidFill>
                   <a:srgbClr val="1E2229"/>
                 </a:solidFill>
@@ -16984,9 +16984,9 @@
                 <a:ea typeface="Calibri" pitchFamily="34" charset="-122"/>
                 <a:cs typeface="Calibri" pitchFamily="34" charset="-120"/>
               </a:rPr>
-              <a:t>The census is a fantastic source of information. The first census was carried out in 1801 and one has been taken every 10 years since then, apart from 1941, because of the Second World War.</a:t>
-            </a:r>
-            <a:endParaRPr lang="en-US" sz="2000" dirty="0"/>
+              <a:t>The census is a rich source for anyone studying a place.</a:t>
+            </a:r>
+            <a:endParaRPr lang="en-US" sz="2200" dirty="0"/>
           </a:p>
         </p:txBody>
       </p:sp>
@@ -17096,7 +17096,7 @@
               <a:buNone/>
             </a:pPr>
             <a:r>
-              <a:rPr lang="en-US" sz="2000" dirty="0">
+              <a:rPr lang="en-US" sz="2200" dirty="0">
                 <a:solidFill>
                   <a:srgbClr val="1E2229"/>
                 </a:solidFill>
@@ -17104,9 +17104,9 @@
                 <a:ea typeface="Calibri" pitchFamily="34" charset="-122"/>
                 <a:cs typeface="Calibri" pitchFamily="34" charset="-120"/>
               </a:rPr>
-              <a:t>The deck gives population figures for Hayes from the census: 233 610 in 1981, 236 047 in 1990, 245 911 in 2000, 269 465 in 2010 and 298 370 in 2015.</a:t>
-            </a:r>
-            <a:endParaRPr lang="en-US" sz="2000" dirty="0"/>
+              <a:t>The deck's own table gives population figures for Hayes in five years: 233 610 in 1981, 236 047 in 1990, 245 911 in 2000, 269 465 in 2010 and 298 370 in 2015.</a:t>
+            </a:r>
+            <a:endParaRPr lang="en-US" sz="2200" dirty="0"/>
           </a:p>
         </p:txBody>
       </p:sp>
@@ -17216,7 +17216,7 @@
               <a:buNone/>
             </a:pPr>
             <a:r>
-              <a:rPr lang="en-US" sz="2000" dirty="0">
+              <a:rPr lang="en-US" sz="2200" dirty="0">
                 <a:solidFill>
                   <a:srgbClr val="1E2229"/>
                 </a:solidFill>
@@ -17226,7 +17226,7 @@
               </a:rPr>
               <a:t>To compare growth fairly we use percentage increase. The rule is: new number minus original number, divided by the original number, times 100.</a:t>
             </a:r>
-            <a:endParaRPr lang="en-US" sz="2000" dirty="0"/>
+            <a:endParaRPr lang="en-US" sz="2200" dirty="0"/>
           </a:p>
         </p:txBody>
       </p:sp>
